--- a/AI_Research_Analytics_Executive_Briefing.pptx
+++ b/AI_Research_Analytics_Executive_Briefing.pptx
@@ -15,6 +15,7 @@
     <p:sldId id="263" r:id="rId14"/>
     <p:sldId id="264" r:id="rId15"/>
     <p:sldId id="265" r:id="rId16"/>
+    <p:sldId id="266" r:id="rId17"/>
   </p:sldIdLst>
   <p:sldSz cx="12191695" cy="6858000" type="screen4x3"/>
   <p:notesSz cx="6858000" cy="9144000"/>
@@ -3904,6 +3905,464 @@
             </a:pPr>
             <a:r>
               <a:t>Evaluate long-term impact on research quality. Scale AI pipeline across all research &amp; analytics departments.</a:t>
+            </a:r>
+          </a:p>
+        </p:txBody>
+      </p:sp>
+    </p:spTree>
+  </p:cSld>
+  <p:clrMapOvr>
+    <a:masterClrMapping/>
+  </p:clrMapOvr>
+</p:sld>
+</file>
+
+<file path=ppt/slides/slide11.xml><?xml version="1.0" encoding="utf-8"?>
+<p:sld xmlns:a="http://schemas.openxmlformats.org/drawingml/2006/main" xmlns:p="http://schemas.openxmlformats.org/presentationml/2006/main" xmlns:r="http://schemas.openxmlformats.org/officeDocument/2006/relationships">
+  <p:cSld>
+    <p:bg>
+      <p:bgPr>
+        <a:solidFill>
+          <a:srgbClr val="F8FAFC"/>
+        </a:solidFill>
+        <a:effectLst/>
+      </p:bgPr>
+    </p:bg>
+    <p:spTree>
+      <p:nvGrpSpPr>
+        <p:cNvPr id="1" name=""/>
+        <p:cNvGrpSpPr/>
+        <p:nvPr/>
+      </p:nvGrpSpPr>
+      <p:grpSpPr/>
+      <p:sp>
+        <p:nvSpPr>
+          <p:cNvPr id="2" name="TextBox 1"/>
+          <p:cNvSpPr txBox="1"/>
+          <p:nvPr/>
+        </p:nvSpPr>
+        <p:spPr>
+          <a:xfrm>
+            <a:off x="731520" y="365760"/>
+            <a:ext cx="10728655" cy="320040"/>
+          </a:xfrm>
+          <a:prstGeom prst="rect">
+            <a:avLst/>
+          </a:prstGeom>
+          <a:noFill/>
+        </p:spPr>
+        <p:txBody>
+          <a:bodyPr wrap="square" lIns="0" tIns="0" rIns="0" bIns="0">
+            <a:spAutoFit/>
+          </a:bodyPr>
+          <a:lstStyle/>
+          <a:p>
+            <a:pPr>
+              <a:defRPr sz="1000" b="1">
+                <a:solidFill>
+                  <a:srgbClr val="4338CA"/>
+                </a:solidFill>
+                <a:latin typeface="Segoe UI"/>
+              </a:defRPr>
+            </a:pPr>
+            <a:r>
+              <a:t>TEAM CREDITS &amp; GOVERNANCE</a:t>
+            </a:r>
+          </a:p>
+        </p:txBody>
+      </p:sp>
+      <p:sp>
+        <p:nvSpPr>
+          <p:cNvPr id="3" name="TextBox 2"/>
+          <p:cNvSpPr txBox="1"/>
+          <p:nvPr/>
+        </p:nvSpPr>
+        <p:spPr>
+          <a:xfrm>
+            <a:off x="731520" y="685800"/>
+            <a:ext cx="10728655" cy="548640"/>
+          </a:xfrm>
+          <a:prstGeom prst="rect">
+            <a:avLst/>
+          </a:prstGeom>
+          <a:noFill/>
+        </p:spPr>
+        <p:txBody>
+          <a:bodyPr wrap="square" lIns="0" tIns="0" rIns="0" bIns="0">
+            <a:spAutoFit/>
+          </a:bodyPr>
+          <a:lstStyle/>
+          <a:p>
+            <a:pPr>
+              <a:defRPr sz="2600" b="1">
+                <a:solidFill>
+                  <a:srgbClr val="0F172A"/>
+                </a:solidFill>
+                <a:latin typeface="Segoe UI"/>
+              </a:defRPr>
+            </a:pPr>
+            <a:r>
+              <a:t>Program Leadership &amp; Architectural Credits</a:t>
+            </a:r>
+          </a:p>
+        </p:txBody>
+      </p:sp>
+      <p:sp>
+        <p:nvSpPr>
+          <p:cNvPr id="4" name="TextBox 3"/>
+          <p:cNvSpPr txBox="1"/>
+          <p:nvPr/>
+        </p:nvSpPr>
+        <p:spPr>
+          <a:xfrm>
+            <a:off x="731520" y="1234440"/>
+            <a:ext cx="10728655" cy="365760"/>
+          </a:xfrm>
+          <a:prstGeom prst="rect">
+            <a:avLst/>
+          </a:prstGeom>
+          <a:noFill/>
+        </p:spPr>
+        <p:txBody>
+          <a:bodyPr wrap="square" lIns="0" tIns="0" rIns="0" bIns="0">
+            <a:spAutoFit/>
+          </a:bodyPr>
+          <a:lstStyle/>
+          <a:p>
+            <a:pPr>
+              <a:defRPr sz="1300">
+                <a:solidFill>
+                  <a:srgbClr val="475569"/>
+                </a:solidFill>
+                <a:latin typeface="Segoe UI"/>
+              </a:defRPr>
+            </a:pPr>
+            <a:r>
+              <a:t>Recognizing the vision, leadership, and technical execution behind the AI stack.</a:t>
+            </a:r>
+          </a:p>
+        </p:txBody>
+      </p:sp>
+      <p:sp>
+        <p:nvSpPr>
+          <p:cNvPr id="5" name="Rounded Rectangle 4"/>
+          <p:cNvSpPr/>
+          <p:nvPr/>
+        </p:nvSpPr>
+        <p:spPr>
+          <a:xfrm>
+            <a:off x="731520" y="1828800"/>
+            <a:ext cx="3328416" cy="4389120"/>
+          </a:xfrm>
+          <a:prstGeom prst="roundRect">
+            <a:avLst/>
+          </a:prstGeom>
+          <a:solidFill>
+            <a:srgbClr val="FFFFFF"/>
+          </a:solidFill>
+          <a:ln w="12700">
+            <a:solidFill>
+              <a:srgbClr val="E2E8F0"/>
+            </a:solidFill>
+          </a:ln>
+        </p:spPr>
+        <p:style>
+          <a:lnRef idx="1">
+            <a:schemeClr val="accent1"/>
+          </a:lnRef>
+          <a:fillRef idx="3">
+            <a:schemeClr val="accent1"/>
+          </a:fillRef>
+          <a:effectRef idx="2">
+            <a:schemeClr val="accent1"/>
+          </a:effectRef>
+          <a:fontRef idx="minor">
+            <a:schemeClr val="lt1"/>
+          </a:fontRef>
+        </p:style>
+        <p:txBody>
+          <a:bodyPr rtlCol="0" anchor="ctr"/>
+          <a:lstStyle/>
+          <a:p>
+            <a:pPr algn="ctr"/>
+          </a:p>
+        </p:txBody>
+      </p:sp>
+      <p:sp>
+        <p:nvSpPr>
+          <p:cNvPr id="6" name="TextBox 5"/>
+          <p:cNvSpPr txBox="1"/>
+          <p:nvPr/>
+        </p:nvSpPr>
+        <p:spPr>
+          <a:xfrm>
+            <a:off x="1005840" y="2194560"/>
+            <a:ext cx="2779776" cy="3657600"/>
+          </a:xfrm>
+          <a:prstGeom prst="rect">
+            <a:avLst/>
+          </a:prstGeom>
+          <a:noFill/>
+        </p:spPr>
+        <p:txBody>
+          <a:bodyPr wrap="square">
+            <a:spAutoFit/>
+          </a:bodyPr>
+          <a:lstStyle/>
+          <a:p>
+            <a:pPr>
+              <a:defRPr sz="1100" b="1">
+                <a:solidFill>
+                  <a:srgbClr val="C05621"/>
+                </a:solidFill>
+                <a:latin typeface="Segoe UI"/>
+              </a:defRPr>
+            </a:pPr>
+            <a:r>
+              <a:t>CONCEPT &amp; PROGRAM CONTEXT</a:t>
+            </a:r>
+          </a:p>
+          <a:p>
+            <a:pPr>
+              <a:defRPr sz="2200" b="1">
+                <a:solidFill>
+                  <a:srgbClr val="0F172A"/>
+                </a:solidFill>
+                <a:latin typeface="Segoe UI"/>
+              </a:defRPr>
+            </a:pPr>
+            <a:r>
+              <a:t>Shilish &amp; Shil</a:t>
+            </a:r>
+          </a:p>
+          <a:p>
+            <a:br/>
+            <a:pPr>
+              <a:defRPr sz="1200">
+                <a:solidFill>
+                  <a:srgbClr val="475569"/>
+                </a:solidFill>
+                <a:latin typeface="Segoe UI"/>
+              </a:defRPr>
+            </a:pPr>
+            <a:r>
+              <a:t>Shilish presented the original concept and program-level code design. Shil helped establish and shape the program context and analytical framework.</a:t>
+            </a:r>
+          </a:p>
+        </p:txBody>
+      </p:sp>
+      <p:sp>
+        <p:nvSpPr>
+          <p:cNvPr id="7" name="Rounded Rectangle 6"/>
+          <p:cNvSpPr/>
+          <p:nvPr/>
+        </p:nvSpPr>
+        <p:spPr>
+          <a:xfrm>
+            <a:off x="4425696" y="1828800"/>
+            <a:ext cx="3328416" cy="4389120"/>
+          </a:xfrm>
+          <a:prstGeom prst="roundRect">
+            <a:avLst/>
+          </a:prstGeom>
+          <a:solidFill>
+            <a:srgbClr val="FFFFFF"/>
+          </a:solidFill>
+          <a:ln w="12700">
+            <a:solidFill>
+              <a:srgbClr val="E2E8F0"/>
+            </a:solidFill>
+          </a:ln>
+        </p:spPr>
+        <p:style>
+          <a:lnRef idx="1">
+            <a:schemeClr val="accent1"/>
+          </a:lnRef>
+          <a:fillRef idx="3">
+            <a:schemeClr val="accent1"/>
+          </a:fillRef>
+          <a:effectRef idx="2">
+            <a:schemeClr val="accent1"/>
+          </a:effectRef>
+          <a:fontRef idx="minor">
+            <a:schemeClr val="lt1"/>
+          </a:fontRef>
+        </p:style>
+        <p:txBody>
+          <a:bodyPr rtlCol="0" anchor="ctr"/>
+          <a:lstStyle/>
+          <a:p>
+            <a:pPr algn="ctr"/>
+          </a:p>
+        </p:txBody>
+      </p:sp>
+      <p:sp>
+        <p:nvSpPr>
+          <p:cNvPr id="8" name="TextBox 7"/>
+          <p:cNvSpPr txBox="1"/>
+          <p:nvPr/>
+        </p:nvSpPr>
+        <p:spPr>
+          <a:xfrm>
+            <a:off x="4700016" y="2194560"/>
+            <a:ext cx="2779776" cy="3657600"/>
+          </a:xfrm>
+          <a:prstGeom prst="rect">
+            <a:avLst/>
+          </a:prstGeom>
+          <a:noFill/>
+        </p:spPr>
+        <p:txBody>
+          <a:bodyPr wrap="square">
+            <a:spAutoFit/>
+          </a:bodyPr>
+          <a:lstStyle/>
+          <a:p>
+            <a:pPr>
+              <a:defRPr sz="1100" b="1">
+                <a:solidFill>
+                  <a:srgbClr val="4338CA"/>
+                </a:solidFill>
+                <a:latin typeface="Segoe UI"/>
+              </a:defRPr>
+            </a:pPr>
+            <a:r>
+              <a:t>GUIDANCE &amp; LEADERSHIP</a:t>
+            </a:r>
+          </a:p>
+          <a:p>
+            <a:pPr>
+              <a:defRPr sz="2200" b="1">
+                <a:solidFill>
+                  <a:srgbClr val="0F172A"/>
+                </a:solidFill>
+                <a:latin typeface="Segoe UI"/>
+              </a:defRPr>
+            </a:pPr>
+            <a:r>
+              <a:t>Rohan</a:t>
+            </a:r>
+          </a:p>
+          <a:p>
+            <a:br/>
+            <a:pPr>
+              <a:defRPr sz="1200">
+                <a:solidFill>
+                  <a:srgbClr val="475569"/>
+                </a:solidFill>
+                <a:latin typeface="Segoe UI"/>
+              </a:defRPr>
+            </a:pPr>
+            <a:r>
+              <a:t>Provided continuous strategic guidance, leadership, and project oversight throughout the program lifecycle.</a:t>
+            </a:r>
+          </a:p>
+        </p:txBody>
+      </p:sp>
+      <p:sp>
+        <p:nvSpPr>
+          <p:cNvPr id="9" name="Rounded Rectangle 8"/>
+          <p:cNvSpPr/>
+          <p:nvPr/>
+        </p:nvSpPr>
+        <p:spPr>
+          <a:xfrm>
+            <a:off x="8119872" y="1828800"/>
+            <a:ext cx="3328416" cy="4389120"/>
+          </a:xfrm>
+          <a:prstGeom prst="roundRect">
+            <a:avLst/>
+          </a:prstGeom>
+          <a:solidFill>
+            <a:srgbClr val="FFFFFF"/>
+          </a:solidFill>
+          <a:ln w="12700">
+            <a:solidFill>
+              <a:srgbClr val="E2E8F0"/>
+            </a:solidFill>
+          </a:ln>
+        </p:spPr>
+        <p:style>
+          <a:lnRef idx="1">
+            <a:schemeClr val="accent1"/>
+          </a:lnRef>
+          <a:fillRef idx="3">
+            <a:schemeClr val="accent1"/>
+          </a:fillRef>
+          <a:effectRef idx="2">
+            <a:schemeClr val="accent1"/>
+          </a:effectRef>
+          <a:fontRef idx="minor">
+            <a:schemeClr val="lt1"/>
+          </a:fontRef>
+        </p:style>
+        <p:txBody>
+          <a:bodyPr rtlCol="0" anchor="ctr"/>
+          <a:lstStyle/>
+          <a:p>
+            <a:pPr algn="ctr"/>
+          </a:p>
+        </p:txBody>
+      </p:sp>
+      <p:sp>
+        <p:nvSpPr>
+          <p:cNvPr id="10" name="TextBox 9"/>
+          <p:cNvSpPr txBox="1"/>
+          <p:nvPr/>
+        </p:nvSpPr>
+        <p:spPr>
+          <a:xfrm>
+            <a:off x="8394192" y="2194560"/>
+            <a:ext cx="2779776" cy="3657600"/>
+          </a:xfrm>
+          <a:prstGeom prst="rect">
+            <a:avLst/>
+          </a:prstGeom>
+          <a:noFill/>
+        </p:spPr>
+        <p:txBody>
+          <a:bodyPr wrap="square">
+            <a:spAutoFit/>
+          </a:bodyPr>
+          <a:lstStyle/>
+          <a:p>
+            <a:pPr>
+              <a:defRPr sz="1100" b="1">
+                <a:solidFill>
+                  <a:srgbClr val="047857"/>
+                </a:solidFill>
+                <a:latin typeface="Segoe UI"/>
+              </a:defRPr>
+            </a:pPr>
+            <a:r>
+              <a:t>LEAD DEVELOPMENT &amp; EXECUTION</a:t>
+            </a:r>
+          </a:p>
+          <a:p>
+            <a:pPr>
+              <a:defRPr sz="2200" b="1">
+                <a:solidFill>
+                  <a:srgbClr val="0F172A"/>
+                </a:solidFill>
+                <a:latin typeface="Segoe UI"/>
+              </a:defRPr>
+            </a:pPr>
+            <a:r>
+              <a:t>Ashish</a:t>
+            </a:r>
+          </a:p>
+          <a:p>
+            <a:br/>
+            <a:pPr>
+              <a:defRPr sz="1200">
+                <a:solidFill>
+                  <a:srgbClr val="475569"/>
+                </a:solidFill>
+                <a:latin typeface="Segoe UI"/>
+              </a:defRPr>
+            </a:pPr>
+            <a:r>
+              <a:t>Lead developer responsible for full-stack implementation, model integration, interactive dashboard development, and deployment.</a:t>
             </a:r>
           </a:p>
         </p:txBody>

--- a/AI_Research_Analytics_Executive_Briefing.pptx
+++ b/AI_Research_Analytics_Executive_Briefing.pptx
@@ -16,6 +16,7 @@
     <p:sldId id="264" r:id="rId15"/>
     <p:sldId id="265" r:id="rId16"/>
     <p:sldId id="266" r:id="rId17"/>
+    <p:sldId id="267" r:id="rId18"/>
   </p:sldIdLst>
   <p:sldSz cx="12191695" cy="6858000" type="screen4x3"/>
   <p:notesSz cx="6858000" cy="9144000"/>
@@ -4132,7 +4133,7 @@
               </a:defRPr>
             </a:pPr>
             <a:r>
-              <a:t>Shilish &amp; Shil</a:t>
+              <a:t>Shirish &amp; Shil</a:t>
             </a:r>
           </a:p>
           <a:p>
@@ -4146,7 +4147,7 @@
               </a:defRPr>
             </a:pPr>
             <a:r>
-              <a:t>Shilish presented the original concept and program-level code design. Shil helped establish and shape the program context and analytical framework.</a:t>
+              <a:t>Shirish presented the original concept and program-level code design. Shil helped establish and shape the program context and analytical framework.</a:t>
             </a:r>
           </a:p>
         </p:txBody>
@@ -4363,6 +4364,592 @@
             </a:pPr>
             <a:r>
               <a:t>Lead developer responsible for full-stack implementation, model integration, interactive dashboard development, and deployment.</a:t>
+            </a:r>
+          </a:p>
+        </p:txBody>
+      </p:sp>
+    </p:spTree>
+  </p:cSld>
+  <p:clrMapOvr>
+    <a:masterClrMapping/>
+  </p:clrMapOvr>
+</p:sld>
+</file>
+
+<file path=ppt/slides/slide12.xml><?xml version="1.0" encoding="utf-8"?>
+<p:sld xmlns:a="http://schemas.openxmlformats.org/drawingml/2006/main" xmlns:p="http://schemas.openxmlformats.org/presentationml/2006/main" xmlns:r="http://schemas.openxmlformats.org/officeDocument/2006/relationships">
+  <p:cSld>
+    <p:bg>
+      <p:bgPr>
+        <a:solidFill>
+          <a:srgbClr val="F8FAFC"/>
+        </a:solidFill>
+        <a:effectLst/>
+      </p:bgPr>
+    </p:bg>
+    <p:spTree>
+      <p:nvGrpSpPr>
+        <p:cNvPr id="1" name=""/>
+        <p:cNvGrpSpPr/>
+        <p:nvPr/>
+      </p:nvGrpSpPr>
+      <p:grpSpPr/>
+      <p:sp>
+        <p:nvSpPr>
+          <p:cNvPr id="2" name="TextBox 1"/>
+          <p:cNvSpPr txBox="1"/>
+          <p:nvPr/>
+        </p:nvSpPr>
+        <p:spPr>
+          <a:xfrm>
+            <a:off x="731520" y="365760"/>
+            <a:ext cx="10728655" cy="320040"/>
+          </a:xfrm>
+          <a:prstGeom prst="rect">
+            <a:avLst/>
+          </a:prstGeom>
+          <a:noFill/>
+        </p:spPr>
+        <p:txBody>
+          <a:bodyPr wrap="square" lIns="0" tIns="0" rIns="0" bIns="0">
+            <a:spAutoFit/>
+          </a:bodyPr>
+          <a:lstStyle/>
+          <a:p>
+            <a:pPr>
+              <a:defRPr sz="1000" b="1">
+                <a:solidFill>
+                  <a:srgbClr val="4338CA"/>
+                </a:solidFill>
+                <a:latin typeface="Segoe UI"/>
+              </a:defRPr>
+            </a:pPr>
+            <a:r>
+              <a:t>LIVE DASHBOARDS &amp; PORTALS</a:t>
+            </a:r>
+          </a:p>
+        </p:txBody>
+      </p:sp>
+      <p:sp>
+        <p:nvSpPr>
+          <p:cNvPr id="3" name="TextBox 2"/>
+          <p:cNvSpPr txBox="1"/>
+          <p:nvPr/>
+        </p:nvSpPr>
+        <p:spPr>
+          <a:xfrm>
+            <a:off x="731520" y="685800"/>
+            <a:ext cx="10728655" cy="548640"/>
+          </a:xfrm>
+          <a:prstGeom prst="rect">
+            <a:avLst/>
+          </a:prstGeom>
+          <a:noFill/>
+        </p:spPr>
+        <p:txBody>
+          <a:bodyPr wrap="square" lIns="0" tIns="0" rIns="0" bIns="0">
+            <a:spAutoFit/>
+          </a:bodyPr>
+          <a:lstStyle/>
+          <a:p>
+            <a:pPr>
+              <a:defRPr sz="2600" b="1">
+                <a:solidFill>
+                  <a:srgbClr val="0F172A"/>
+                </a:solidFill>
+                <a:latin typeface="Segoe UI"/>
+              </a:defRPr>
+            </a:pPr>
+            <a:r>
+              <a:t>Integrated Ecosystem of 4 Live Analytics Portals</a:t>
+            </a:r>
+          </a:p>
+        </p:txBody>
+      </p:sp>
+      <p:sp>
+        <p:nvSpPr>
+          <p:cNvPr id="4" name="TextBox 3"/>
+          <p:cNvSpPr txBox="1"/>
+          <p:nvPr/>
+        </p:nvSpPr>
+        <p:spPr>
+          <a:xfrm>
+            <a:off x="731520" y="1234440"/>
+            <a:ext cx="10728655" cy="365760"/>
+          </a:xfrm>
+          <a:prstGeom prst="rect">
+            <a:avLst/>
+          </a:prstGeom>
+          <a:noFill/>
+        </p:spPr>
+        <p:txBody>
+          <a:bodyPr wrap="square" lIns="0" tIns="0" rIns="0" bIns="0">
+            <a:spAutoFit/>
+          </a:bodyPr>
+          <a:lstStyle/>
+          <a:p>
+            <a:pPr>
+              <a:defRPr sz="1300">
+                <a:solidFill>
+                  <a:srgbClr val="475569"/>
+                </a:solidFill>
+                <a:latin typeface="Segoe UI"/>
+              </a:defRPr>
+            </a:pPr>
+            <a:r>
+              <a:t>Direct cloud &amp; web access to operational dashboards and research telemetry.</a:t>
+            </a:r>
+          </a:p>
+        </p:txBody>
+      </p:sp>
+      <p:sp>
+        <p:nvSpPr>
+          <p:cNvPr id="5" name="Rounded Rectangle 4"/>
+          <p:cNvSpPr/>
+          <p:nvPr/>
+        </p:nvSpPr>
+        <p:spPr>
+          <a:xfrm>
+            <a:off x="731520" y="1828800"/>
+            <a:ext cx="2514600" cy="4389120"/>
+          </a:xfrm>
+          <a:prstGeom prst="roundRect">
+            <a:avLst/>
+          </a:prstGeom>
+          <a:solidFill>
+            <a:srgbClr val="FFFFFF"/>
+          </a:solidFill>
+          <a:ln w="12700">
+            <a:solidFill>
+              <a:srgbClr val="E2E8F0"/>
+            </a:solidFill>
+          </a:ln>
+        </p:spPr>
+        <p:style>
+          <a:lnRef idx="1">
+            <a:schemeClr val="accent1"/>
+          </a:lnRef>
+          <a:fillRef idx="3">
+            <a:schemeClr val="accent1"/>
+          </a:fillRef>
+          <a:effectRef idx="2">
+            <a:schemeClr val="accent1"/>
+          </a:effectRef>
+          <a:fontRef idx="minor">
+            <a:schemeClr val="lt1"/>
+          </a:fontRef>
+        </p:style>
+        <p:txBody>
+          <a:bodyPr rtlCol="0" anchor="ctr"/>
+          <a:lstStyle/>
+          <a:p>
+            <a:pPr algn="ctr"/>
+          </a:p>
+        </p:txBody>
+      </p:sp>
+      <p:sp>
+        <p:nvSpPr>
+          <p:cNvPr id="6" name="TextBox 5"/>
+          <p:cNvSpPr txBox="1"/>
+          <p:nvPr/>
+        </p:nvSpPr>
+        <p:spPr>
+          <a:xfrm>
+            <a:off x="914400" y="2103120"/>
+            <a:ext cx="2148840" cy="3840480"/>
+          </a:xfrm>
+          <a:prstGeom prst="rect">
+            <a:avLst/>
+          </a:prstGeom>
+          <a:noFill/>
+        </p:spPr>
+        <p:txBody>
+          <a:bodyPr wrap="square">
+            <a:spAutoFit/>
+          </a:bodyPr>
+          <a:lstStyle/>
+          <a:p>
+            <a:pPr>
+              <a:defRPr sz="1000" b="1">
+                <a:solidFill>
+                  <a:srgbClr val="E11D48"/>
+                </a:solidFill>
+                <a:latin typeface="Segoe UI"/>
+              </a:defRPr>
+            </a:pPr>
+            <a:r>
+              <a:t>PORTAL 01</a:t>
+            </a:r>
+          </a:p>
+          <a:p>
+            <a:pPr>
+              <a:defRPr sz="1400" b="1">
+                <a:solidFill>
+                  <a:srgbClr val="0F172A"/>
+                </a:solidFill>
+                <a:latin typeface="Segoe UI"/>
+              </a:defRPr>
+            </a:pPr>
+            <a:r>
+              <a:t>EDS Streamlit Dashboard</a:t>
+            </a:r>
+          </a:p>
+          <a:p>
+            <a:br/>
+            <a:pPr>
+              <a:defRPr sz="1050">
+                <a:solidFill>
+                  <a:srgbClr val="475569"/>
+                </a:solidFill>
+                <a:latin typeface="Segoe UI"/>
+              </a:defRPr>
+            </a:pPr>
+            <a:r>
+              <a:t>Teacher training material availability &amp; field observation telemetry.</a:t>
+            </a:r>
+            <a:br/>
+            <a:br/>
+            <a:r>
+              <a:t>URL: https://cm-rise-eds-dashboard.streamlit.app/</a:t>
+            </a:r>
+          </a:p>
+        </p:txBody>
+      </p:sp>
+      <p:sp>
+        <p:nvSpPr>
+          <p:cNvPr id="7" name="Rounded Rectangle 6"/>
+          <p:cNvSpPr/>
+          <p:nvPr/>
+        </p:nvSpPr>
+        <p:spPr>
+          <a:xfrm>
+            <a:off x="3465576" y="1828800"/>
+            <a:ext cx="2514600" cy="4389120"/>
+          </a:xfrm>
+          <a:prstGeom prst="roundRect">
+            <a:avLst/>
+          </a:prstGeom>
+          <a:solidFill>
+            <a:srgbClr val="FFFFFF"/>
+          </a:solidFill>
+          <a:ln w="12700">
+            <a:solidFill>
+              <a:srgbClr val="E2E8F0"/>
+            </a:solidFill>
+          </a:ln>
+        </p:spPr>
+        <p:style>
+          <a:lnRef idx="1">
+            <a:schemeClr val="accent1"/>
+          </a:lnRef>
+          <a:fillRef idx="3">
+            <a:schemeClr val="accent1"/>
+          </a:fillRef>
+          <a:effectRef idx="2">
+            <a:schemeClr val="accent1"/>
+          </a:effectRef>
+          <a:fontRef idx="minor">
+            <a:schemeClr val="lt1"/>
+          </a:fontRef>
+        </p:style>
+        <p:txBody>
+          <a:bodyPr rtlCol="0" anchor="ctr"/>
+          <a:lstStyle/>
+          <a:p>
+            <a:pPr algn="ctr"/>
+          </a:p>
+        </p:txBody>
+      </p:sp>
+      <p:sp>
+        <p:nvSpPr>
+          <p:cNvPr id="8" name="TextBox 7"/>
+          <p:cNvSpPr txBox="1"/>
+          <p:nvPr/>
+        </p:nvSpPr>
+        <p:spPr>
+          <a:xfrm>
+            <a:off x="3648456" y="2103120"/>
+            <a:ext cx="2148840" cy="3840480"/>
+          </a:xfrm>
+          <a:prstGeom prst="rect">
+            <a:avLst/>
+          </a:prstGeom>
+          <a:noFill/>
+        </p:spPr>
+        <p:txBody>
+          <a:bodyPr wrap="square">
+            <a:spAutoFit/>
+          </a:bodyPr>
+          <a:lstStyle/>
+          <a:p>
+            <a:pPr>
+              <a:defRPr sz="1000" b="1">
+                <a:solidFill>
+                  <a:srgbClr val="7C3AED"/>
+                </a:solidFill>
+                <a:latin typeface="Segoe UI"/>
+              </a:defRPr>
+            </a:pPr>
+            <a:r>
+              <a:t>PORTAL 02</a:t>
+            </a:r>
+          </a:p>
+          <a:p>
+            <a:pPr>
+              <a:defRPr sz="1400" b="1">
+                <a:solidFill>
+                  <a:srgbClr val="0F172A"/>
+                </a:solidFill>
+                <a:latin typeface="Segoe UI"/>
+              </a:defRPr>
+            </a:pPr>
+            <a:r>
+              <a:t>CRO Streamlit Dashboard</a:t>
+            </a:r>
+          </a:p>
+          <a:p>
+            <a:br/>
+            <a:pPr>
+              <a:defRPr sz="1050">
+                <a:solidFill>
+                  <a:srgbClr val="475569"/>
+                </a:solidFill>
+                <a:latin typeface="Segoe UI"/>
+              </a:defRPr>
+            </a:pPr>
+            <a:r>
+              <a:t>Classroom observation &amp; attendance alignment analytics across 411 schools.</a:t>
+            </a:r>
+            <a:br/>
+            <a:br/>
+            <a:r>
+              <a:t>URL: https://peepul-mp-cpd-cro-dashboard.streamlit.app/</a:t>
+            </a:r>
+          </a:p>
+        </p:txBody>
+      </p:sp>
+      <p:sp>
+        <p:nvSpPr>
+          <p:cNvPr id="9" name="Rounded Rectangle 8"/>
+          <p:cNvSpPr/>
+          <p:nvPr/>
+        </p:nvSpPr>
+        <p:spPr>
+          <a:xfrm>
+            <a:off x="6199632" y="1828800"/>
+            <a:ext cx="2514600" cy="4389120"/>
+          </a:xfrm>
+          <a:prstGeom prst="roundRect">
+            <a:avLst/>
+          </a:prstGeom>
+          <a:solidFill>
+            <a:srgbClr val="FFFFFF"/>
+          </a:solidFill>
+          <a:ln w="12700">
+            <a:solidFill>
+              <a:srgbClr val="E2E8F0"/>
+            </a:solidFill>
+          </a:ln>
+        </p:spPr>
+        <p:style>
+          <a:lnRef idx="1">
+            <a:schemeClr val="accent1"/>
+          </a:lnRef>
+          <a:fillRef idx="3">
+            <a:schemeClr val="accent1"/>
+          </a:fillRef>
+          <a:effectRef idx="2">
+            <a:schemeClr val="accent1"/>
+          </a:effectRef>
+          <a:fontRef idx="minor">
+            <a:schemeClr val="lt1"/>
+          </a:fontRef>
+        </p:style>
+        <p:txBody>
+          <a:bodyPr rtlCol="0" anchor="ctr"/>
+          <a:lstStyle/>
+          <a:p>
+            <a:pPr algn="ctr"/>
+          </a:p>
+        </p:txBody>
+      </p:sp>
+      <p:sp>
+        <p:nvSpPr>
+          <p:cNvPr id="10" name="TextBox 9"/>
+          <p:cNvSpPr txBox="1"/>
+          <p:nvPr/>
+        </p:nvSpPr>
+        <p:spPr>
+          <a:xfrm>
+            <a:off x="6382512" y="2103120"/>
+            <a:ext cx="2148840" cy="3840480"/>
+          </a:xfrm>
+          <a:prstGeom prst="rect">
+            <a:avLst/>
+          </a:prstGeom>
+          <a:noFill/>
+        </p:spPr>
+        <p:txBody>
+          <a:bodyPr wrap="square">
+            <a:spAutoFit/>
+          </a:bodyPr>
+          <a:lstStyle/>
+          <a:p>
+            <a:pPr>
+              <a:defRPr sz="1000" b="1">
+                <a:solidFill>
+                  <a:srgbClr val="4338CA"/>
+                </a:solidFill>
+                <a:latin typeface="Segoe UI"/>
+              </a:defRPr>
+            </a:pPr>
+            <a:r>
+              <a:t>PORTAL 03</a:t>
+            </a:r>
+          </a:p>
+          <a:p>
+            <a:pPr>
+              <a:defRPr sz="1400" b="1">
+                <a:solidFill>
+                  <a:srgbClr val="0F172A"/>
+                </a:solidFill>
+                <a:latin typeface="Segoe UI"/>
+              </a:defRPr>
+            </a:pPr>
+            <a:r>
+              <a:t>Lifted Analytics Dashboard</a:t>
+            </a:r>
+          </a:p>
+          <a:p>
+            <a:br/>
+            <a:pPr>
+              <a:defRPr sz="1050">
+                <a:solidFill>
+                  <a:srgbClr val="475569"/>
+                </a:solidFill>
+                <a:latin typeface="Segoe UI"/>
+              </a:defRPr>
+            </a:pPr>
+            <a:r>
+              <a:t>Intervention fidelity &amp; multi-district telemetry infrastructure.</a:t>
+            </a:r>
+            <a:br/>
+            <a:br/>
+            <a:r>
+              <a:t>URL: https://ashishghanghoriya1-png.github.io/lifted-analytics-dashboard/</a:t>
+            </a:r>
+          </a:p>
+        </p:txBody>
+      </p:sp>
+      <p:sp>
+        <p:nvSpPr>
+          <p:cNvPr id="11" name="Rounded Rectangle 10"/>
+          <p:cNvSpPr/>
+          <p:nvPr/>
+        </p:nvSpPr>
+        <p:spPr>
+          <a:xfrm>
+            <a:off x="8933688" y="1828800"/>
+            <a:ext cx="2514600" cy="4389120"/>
+          </a:xfrm>
+          <a:prstGeom prst="roundRect">
+            <a:avLst/>
+          </a:prstGeom>
+          <a:solidFill>
+            <a:srgbClr val="FFFFFF"/>
+          </a:solidFill>
+          <a:ln w="12700">
+            <a:solidFill>
+              <a:srgbClr val="E2E8F0"/>
+            </a:solidFill>
+          </a:ln>
+        </p:spPr>
+        <p:style>
+          <a:lnRef idx="1">
+            <a:schemeClr val="accent1"/>
+          </a:lnRef>
+          <a:fillRef idx="3">
+            <a:schemeClr val="accent1"/>
+          </a:fillRef>
+          <a:effectRef idx="2">
+            <a:schemeClr val="accent1"/>
+          </a:effectRef>
+          <a:fontRef idx="minor">
+            <a:schemeClr val="lt1"/>
+          </a:fontRef>
+        </p:style>
+        <p:txBody>
+          <a:bodyPr rtlCol="0" anchor="ctr"/>
+          <a:lstStyle/>
+          <a:p>
+            <a:pPr algn="ctr"/>
+          </a:p>
+        </p:txBody>
+      </p:sp>
+      <p:sp>
+        <p:nvSpPr>
+          <p:cNvPr id="12" name="TextBox 11"/>
+          <p:cNvSpPr txBox="1"/>
+          <p:nvPr/>
+        </p:nvSpPr>
+        <p:spPr>
+          <a:xfrm>
+            <a:off x="9116568" y="2103120"/>
+            <a:ext cx="2148840" cy="3840480"/>
+          </a:xfrm>
+          <a:prstGeom prst="rect">
+            <a:avLst/>
+          </a:prstGeom>
+          <a:noFill/>
+        </p:spPr>
+        <p:txBody>
+          <a:bodyPr wrap="square">
+            <a:spAutoFit/>
+          </a:bodyPr>
+          <a:lstStyle/>
+          <a:p>
+            <a:pPr>
+              <a:defRPr sz="1000" b="1">
+                <a:solidFill>
+                  <a:srgbClr val="047857"/>
+                </a:solidFill>
+                <a:latin typeface="Segoe UI"/>
+              </a:defRPr>
+            </a:pPr>
+            <a:r>
+              <a:t>PORTAL 04</a:t>
+            </a:r>
+          </a:p>
+          <a:p>
+            <a:pPr>
+              <a:defRPr sz="1400" b="1">
+                <a:solidFill>
+                  <a:srgbClr val="0F172A"/>
+                </a:solidFill>
+                <a:latin typeface="Segoe UI"/>
+              </a:defRPr>
+            </a:pPr>
+            <a:r>
+              <a:t>MP Shaikshik Samwaad</a:t>
+            </a:r>
+          </a:p>
+          <a:p>
+            <a:br/>
+            <a:pPr>
+              <a:defRPr sz="1050">
+                <a:solidFill>
+                  <a:srgbClr val="475569"/>
+                </a:solidFill>
+                <a:latin typeface="Segoe UI"/>
+              </a:defRPr>
+            </a:pPr>
+            <a:r>
+              <a:t>Academic dialogue metrics &amp; teacher engagement analytics across Madhya Pradesh.</a:t>
+            </a:r>
+            <a:br/>
+            <a:br/>
+            <a:r>
+              <a:t>URL: https://ashishghanghoriya1-png.github.io/MP-Shaikshik-Samwaad/</a:t>
             </a:r>
           </a:p>
         </p:txBody>

--- a/AI_Research_Analytics_Executive_Briefing.pptx
+++ b/AI_Research_Analytics_Executive_Briefing.pptx
@@ -3109,7 +3109,43 @@
       <p:grpSpPr/>
       <p:sp>
         <p:nvSpPr>
-          <p:cNvPr id="2" name="Rounded Rectangle 1"/>
+          <p:cNvPr id="2" name="TextBox 1"/>
+          <p:cNvSpPr txBox="1"/>
+          <p:nvPr/>
+        </p:nvSpPr>
+        <p:spPr>
+          <a:xfrm>
+            <a:off x="8686800" y="6400800"/>
+            <a:ext cx="2743200" cy="320040"/>
+          </a:xfrm>
+          <a:prstGeom prst="rect">
+            <a:avLst/>
+          </a:prstGeom>
+          <a:noFill/>
+        </p:spPr>
+        <p:txBody>
+          <a:bodyPr wrap="none" lIns="0" tIns="0" rIns="0" bIns="0">
+            <a:spAutoFit/>
+          </a:bodyPr>
+          <a:lstStyle/>
+          <a:p>
+            <a:pPr algn="r">
+              <a:defRPr sz="900">
+                <a:solidFill>
+                  <a:srgbClr val="475569"/>
+                </a:solidFill>
+                <a:latin typeface="Segoe UI"/>
+              </a:defRPr>
+            </a:pPr>
+            <a:r>
+              <a:t>Prepared by Ashish</a:t>
+            </a:r>
+          </a:p>
+        </p:txBody>
+      </p:sp>
+      <p:sp>
+        <p:nvSpPr>
+          <p:cNvPr id="3" name="Rounded Rectangle 2"/>
           <p:cNvSpPr/>
           <p:nvPr/>
         </p:nvSpPr>
@@ -3154,7 +3190,7 @@
       </p:sp>
       <p:sp>
         <p:nvSpPr>
-          <p:cNvPr id="3" name="Rounded Rectangle 2"/>
+          <p:cNvPr id="4" name="Rounded Rectangle 3"/>
           <p:cNvSpPr/>
           <p:nvPr/>
         </p:nvSpPr>
@@ -3209,7 +3245,7 @@
       </p:sp>
       <p:sp>
         <p:nvSpPr>
-          <p:cNvPr id="4" name="TextBox 3"/>
+          <p:cNvPr id="5" name="TextBox 4"/>
           <p:cNvSpPr txBox="1"/>
           <p:nvPr/>
         </p:nvSpPr>
@@ -3258,7 +3294,7 @@
       </p:sp>
       <p:sp>
         <p:nvSpPr>
-          <p:cNvPr id="5" name="TextBox 4"/>
+          <p:cNvPr id="6" name="TextBox 5"/>
           <p:cNvSpPr txBox="1"/>
           <p:nvPr/>
         </p:nvSpPr>
@@ -3480,7 +3516,43 @@
       </p:sp>
       <p:sp>
         <p:nvSpPr>
-          <p:cNvPr id="5" name="Rounded Rectangle 4"/>
+          <p:cNvPr id="5" name="TextBox 4"/>
+          <p:cNvSpPr txBox="1"/>
+          <p:nvPr/>
+        </p:nvSpPr>
+        <p:spPr>
+          <a:xfrm>
+            <a:off x="8686800" y="6400800"/>
+            <a:ext cx="2743200" cy="320040"/>
+          </a:xfrm>
+          <a:prstGeom prst="rect">
+            <a:avLst/>
+          </a:prstGeom>
+          <a:noFill/>
+        </p:spPr>
+        <p:txBody>
+          <a:bodyPr wrap="none" lIns="0" tIns="0" rIns="0" bIns="0">
+            <a:spAutoFit/>
+          </a:bodyPr>
+          <a:lstStyle/>
+          <a:p>
+            <a:pPr algn="r">
+              <a:defRPr sz="900">
+                <a:solidFill>
+                  <a:srgbClr val="475569"/>
+                </a:solidFill>
+                <a:latin typeface="Segoe UI"/>
+              </a:defRPr>
+            </a:pPr>
+            <a:r>
+              <a:t>Prepared by Ashish</a:t>
+            </a:r>
+          </a:p>
+        </p:txBody>
+      </p:sp>
+      <p:sp>
+        <p:nvSpPr>
+          <p:cNvPr id="6" name="Rounded Rectangle 5"/>
           <p:cNvSpPr/>
           <p:nvPr/>
         </p:nvSpPr>
@@ -3525,7 +3597,7 @@
       </p:sp>
       <p:sp>
         <p:nvSpPr>
-          <p:cNvPr id="6" name="TextBox 5"/>
+          <p:cNvPr id="7" name="TextBox 6"/>
           <p:cNvSpPr txBox="1"/>
           <p:nvPr/>
         </p:nvSpPr>
@@ -3588,7 +3660,7 @@
       </p:sp>
       <p:sp>
         <p:nvSpPr>
-          <p:cNvPr id="7" name="Rounded Rectangle 6"/>
+          <p:cNvPr id="8" name="Rounded Rectangle 7"/>
           <p:cNvSpPr/>
           <p:nvPr/>
         </p:nvSpPr>
@@ -3633,7 +3705,7 @@
       </p:sp>
       <p:sp>
         <p:nvSpPr>
-          <p:cNvPr id="8" name="TextBox 7"/>
+          <p:cNvPr id="9" name="TextBox 8"/>
           <p:cNvSpPr txBox="1"/>
           <p:nvPr/>
         </p:nvSpPr>
@@ -3696,7 +3768,7 @@
       </p:sp>
       <p:sp>
         <p:nvSpPr>
-          <p:cNvPr id="9" name="Rounded Rectangle 8"/>
+          <p:cNvPr id="10" name="Rounded Rectangle 9"/>
           <p:cNvSpPr/>
           <p:nvPr/>
         </p:nvSpPr>
@@ -3741,7 +3813,7 @@
       </p:sp>
       <p:sp>
         <p:nvSpPr>
-          <p:cNvPr id="10" name="TextBox 9"/>
+          <p:cNvPr id="11" name="TextBox 10"/>
           <p:cNvSpPr txBox="1"/>
           <p:nvPr/>
         </p:nvSpPr>
@@ -3804,7 +3876,7 @@
       </p:sp>
       <p:sp>
         <p:nvSpPr>
-          <p:cNvPr id="11" name="Rounded Rectangle 10"/>
+          <p:cNvPr id="12" name="Rounded Rectangle 11"/>
           <p:cNvSpPr/>
           <p:nvPr/>
         </p:nvSpPr>
@@ -3849,7 +3921,7 @@
       </p:sp>
       <p:sp>
         <p:nvSpPr>
-          <p:cNvPr id="12" name="TextBox 11"/>
+          <p:cNvPr id="13" name="TextBox 12"/>
           <p:cNvSpPr txBox="1"/>
           <p:nvPr/>
         </p:nvSpPr>
@@ -4046,7 +4118,43 @@
       </p:sp>
       <p:sp>
         <p:nvSpPr>
-          <p:cNvPr id="5" name="Rounded Rectangle 4"/>
+          <p:cNvPr id="5" name="TextBox 4"/>
+          <p:cNvSpPr txBox="1"/>
+          <p:nvPr/>
+        </p:nvSpPr>
+        <p:spPr>
+          <a:xfrm>
+            <a:off x="8686800" y="6400800"/>
+            <a:ext cx="2743200" cy="320040"/>
+          </a:xfrm>
+          <a:prstGeom prst="rect">
+            <a:avLst/>
+          </a:prstGeom>
+          <a:noFill/>
+        </p:spPr>
+        <p:txBody>
+          <a:bodyPr wrap="none" lIns="0" tIns="0" rIns="0" bIns="0">
+            <a:spAutoFit/>
+          </a:bodyPr>
+          <a:lstStyle/>
+          <a:p>
+            <a:pPr algn="r">
+              <a:defRPr sz="900">
+                <a:solidFill>
+                  <a:srgbClr val="475569"/>
+                </a:solidFill>
+                <a:latin typeface="Segoe UI"/>
+              </a:defRPr>
+            </a:pPr>
+            <a:r>
+              <a:t>Prepared by Ashish</a:t>
+            </a:r>
+          </a:p>
+        </p:txBody>
+      </p:sp>
+      <p:sp>
+        <p:nvSpPr>
+          <p:cNvPr id="6" name="Rounded Rectangle 5"/>
           <p:cNvSpPr/>
           <p:nvPr/>
         </p:nvSpPr>
@@ -4091,7 +4199,7 @@
       </p:sp>
       <p:sp>
         <p:nvSpPr>
-          <p:cNvPr id="6" name="TextBox 5"/>
+          <p:cNvPr id="7" name="TextBox 6"/>
           <p:cNvSpPr txBox="1"/>
           <p:nvPr/>
         </p:nvSpPr>
@@ -4154,7 +4262,7 @@
       </p:sp>
       <p:sp>
         <p:nvSpPr>
-          <p:cNvPr id="7" name="Rounded Rectangle 6"/>
+          <p:cNvPr id="8" name="Rounded Rectangle 7"/>
           <p:cNvSpPr/>
           <p:nvPr/>
         </p:nvSpPr>
@@ -4199,7 +4307,7 @@
       </p:sp>
       <p:sp>
         <p:nvSpPr>
-          <p:cNvPr id="8" name="TextBox 7"/>
+          <p:cNvPr id="9" name="TextBox 8"/>
           <p:cNvSpPr txBox="1"/>
           <p:nvPr/>
         </p:nvSpPr>
@@ -4262,7 +4370,7 @@
       </p:sp>
       <p:sp>
         <p:nvSpPr>
-          <p:cNvPr id="9" name="Rounded Rectangle 8"/>
+          <p:cNvPr id="10" name="Rounded Rectangle 9"/>
           <p:cNvSpPr/>
           <p:nvPr/>
         </p:nvSpPr>
@@ -4307,7 +4415,7 @@
       </p:sp>
       <p:sp>
         <p:nvSpPr>
-          <p:cNvPr id="10" name="TextBox 9"/>
+          <p:cNvPr id="11" name="TextBox 10"/>
           <p:cNvSpPr txBox="1"/>
           <p:nvPr/>
         </p:nvSpPr>
@@ -4336,7 +4444,7 @@
               </a:defRPr>
             </a:pPr>
             <a:r>
-              <a:t>LEAD DEVELOPMENT &amp; EXECUTION</a:t>
+              <a:t>DEVELOPMENT &amp; EXECUTION</a:t>
             </a:r>
           </a:p>
           <a:p>
@@ -4363,7 +4471,7 @@
               </a:defRPr>
             </a:pPr>
             <a:r>
-              <a:t>Lead developer responsible for full-stack implementation, model integration, interactive dashboard development, and deployment.</a:t>
+              <a:t>Developer responsible for full-stack implementation, model integration, interactive dashboard development, and deployment.</a:t>
             </a:r>
           </a:p>
         </p:txBody>
@@ -4504,7 +4612,43 @@
       </p:sp>
       <p:sp>
         <p:nvSpPr>
-          <p:cNvPr id="5" name="Rounded Rectangle 4"/>
+          <p:cNvPr id="5" name="TextBox 4"/>
+          <p:cNvSpPr txBox="1"/>
+          <p:nvPr/>
+        </p:nvSpPr>
+        <p:spPr>
+          <a:xfrm>
+            <a:off x="8686800" y="6400800"/>
+            <a:ext cx="2743200" cy="320040"/>
+          </a:xfrm>
+          <a:prstGeom prst="rect">
+            <a:avLst/>
+          </a:prstGeom>
+          <a:noFill/>
+        </p:spPr>
+        <p:txBody>
+          <a:bodyPr wrap="none" lIns="0" tIns="0" rIns="0" bIns="0">
+            <a:spAutoFit/>
+          </a:bodyPr>
+          <a:lstStyle/>
+          <a:p>
+            <a:pPr algn="r">
+              <a:defRPr sz="900">
+                <a:solidFill>
+                  <a:srgbClr val="475569"/>
+                </a:solidFill>
+                <a:latin typeface="Segoe UI"/>
+              </a:defRPr>
+            </a:pPr>
+            <a:r>
+              <a:t>Prepared by Ashish</a:t>
+            </a:r>
+          </a:p>
+        </p:txBody>
+      </p:sp>
+      <p:sp>
+        <p:nvSpPr>
+          <p:cNvPr id="6" name="Rounded Rectangle 5"/>
           <p:cNvSpPr/>
           <p:nvPr/>
         </p:nvSpPr>
@@ -4549,7 +4693,7 @@
       </p:sp>
       <p:sp>
         <p:nvSpPr>
-          <p:cNvPr id="6" name="TextBox 5"/>
+          <p:cNvPr id="7" name="TextBox 6"/>
           <p:cNvSpPr txBox="1"/>
           <p:nvPr/>
         </p:nvSpPr>
@@ -4617,7 +4761,7 @@
       </p:sp>
       <p:sp>
         <p:nvSpPr>
-          <p:cNvPr id="7" name="Rounded Rectangle 6"/>
+          <p:cNvPr id="8" name="Rounded Rectangle 7"/>
           <p:cNvSpPr/>
           <p:nvPr/>
         </p:nvSpPr>
@@ -4662,7 +4806,7 @@
       </p:sp>
       <p:sp>
         <p:nvSpPr>
-          <p:cNvPr id="8" name="TextBox 7"/>
+          <p:cNvPr id="9" name="TextBox 8"/>
           <p:cNvSpPr txBox="1"/>
           <p:nvPr/>
         </p:nvSpPr>
@@ -4730,7 +4874,7 @@
       </p:sp>
       <p:sp>
         <p:nvSpPr>
-          <p:cNvPr id="9" name="Rounded Rectangle 8"/>
+          <p:cNvPr id="10" name="Rounded Rectangle 9"/>
           <p:cNvSpPr/>
           <p:nvPr/>
         </p:nvSpPr>
@@ -4775,7 +4919,7 @@
       </p:sp>
       <p:sp>
         <p:nvSpPr>
-          <p:cNvPr id="10" name="TextBox 9"/>
+          <p:cNvPr id="11" name="TextBox 10"/>
           <p:cNvSpPr txBox="1"/>
           <p:nvPr/>
         </p:nvSpPr>
@@ -4843,7 +4987,7 @@
       </p:sp>
       <p:sp>
         <p:nvSpPr>
-          <p:cNvPr id="11" name="Rounded Rectangle 10"/>
+          <p:cNvPr id="12" name="Rounded Rectangle 11"/>
           <p:cNvSpPr/>
           <p:nvPr/>
         </p:nvSpPr>
@@ -4888,7 +5032,7 @@
       </p:sp>
       <p:sp>
         <p:nvSpPr>
-          <p:cNvPr id="12" name="TextBox 11"/>
+          <p:cNvPr id="13" name="TextBox 12"/>
           <p:cNvSpPr txBox="1"/>
           <p:nvPr/>
         </p:nvSpPr>
@@ -5090,7 +5234,43 @@
       </p:sp>
       <p:sp>
         <p:nvSpPr>
-          <p:cNvPr id="5" name="Rounded Rectangle 4"/>
+          <p:cNvPr id="5" name="TextBox 4"/>
+          <p:cNvSpPr txBox="1"/>
+          <p:nvPr/>
+        </p:nvSpPr>
+        <p:spPr>
+          <a:xfrm>
+            <a:off x="8686800" y="6400800"/>
+            <a:ext cx="2743200" cy="320040"/>
+          </a:xfrm>
+          <a:prstGeom prst="rect">
+            <a:avLst/>
+          </a:prstGeom>
+          <a:noFill/>
+        </p:spPr>
+        <p:txBody>
+          <a:bodyPr wrap="none" lIns="0" tIns="0" rIns="0" bIns="0">
+            <a:spAutoFit/>
+          </a:bodyPr>
+          <a:lstStyle/>
+          <a:p>
+            <a:pPr algn="r">
+              <a:defRPr sz="900">
+                <a:solidFill>
+                  <a:srgbClr val="475569"/>
+                </a:solidFill>
+                <a:latin typeface="Segoe UI"/>
+              </a:defRPr>
+            </a:pPr>
+            <a:r>
+              <a:t>Prepared by Ashish</a:t>
+            </a:r>
+          </a:p>
+        </p:txBody>
+      </p:sp>
+      <p:sp>
+        <p:nvSpPr>
+          <p:cNvPr id="6" name="Rounded Rectangle 5"/>
           <p:cNvSpPr/>
           <p:nvPr/>
         </p:nvSpPr>
@@ -5135,7 +5315,7 @@
       </p:sp>
       <p:sp>
         <p:nvSpPr>
-          <p:cNvPr id="6" name="TextBox 5"/>
+          <p:cNvPr id="7" name="TextBox 6"/>
           <p:cNvSpPr txBox="1"/>
           <p:nvPr/>
         </p:nvSpPr>
@@ -5198,7 +5378,7 @@
       </p:sp>
       <p:sp>
         <p:nvSpPr>
-          <p:cNvPr id="7" name="Rounded Rectangle 6"/>
+          <p:cNvPr id="8" name="Rounded Rectangle 7"/>
           <p:cNvSpPr/>
           <p:nvPr/>
         </p:nvSpPr>
@@ -5243,7 +5423,7 @@
       </p:sp>
       <p:sp>
         <p:nvSpPr>
-          <p:cNvPr id="8" name="TextBox 7"/>
+          <p:cNvPr id="9" name="TextBox 8"/>
           <p:cNvSpPr txBox="1"/>
           <p:nvPr/>
         </p:nvSpPr>
@@ -5306,7 +5486,7 @@
       </p:sp>
       <p:sp>
         <p:nvSpPr>
-          <p:cNvPr id="9" name="Rounded Rectangle 8"/>
+          <p:cNvPr id="10" name="Rounded Rectangle 9"/>
           <p:cNvSpPr/>
           <p:nvPr/>
         </p:nvSpPr>
@@ -5351,7 +5531,7 @@
       </p:sp>
       <p:sp>
         <p:nvSpPr>
-          <p:cNvPr id="10" name="TextBox 9"/>
+          <p:cNvPr id="11" name="TextBox 10"/>
           <p:cNvSpPr txBox="1"/>
           <p:nvPr/>
         </p:nvSpPr>
@@ -5548,7 +5728,43 @@
       </p:sp>
       <p:sp>
         <p:nvSpPr>
-          <p:cNvPr id="5" name="Rounded Rectangle 4"/>
+          <p:cNvPr id="5" name="TextBox 4"/>
+          <p:cNvSpPr txBox="1"/>
+          <p:nvPr/>
+        </p:nvSpPr>
+        <p:spPr>
+          <a:xfrm>
+            <a:off x="8686800" y="6400800"/>
+            <a:ext cx="2743200" cy="320040"/>
+          </a:xfrm>
+          <a:prstGeom prst="rect">
+            <a:avLst/>
+          </a:prstGeom>
+          <a:noFill/>
+        </p:spPr>
+        <p:txBody>
+          <a:bodyPr wrap="none" lIns="0" tIns="0" rIns="0" bIns="0">
+            <a:spAutoFit/>
+          </a:bodyPr>
+          <a:lstStyle/>
+          <a:p>
+            <a:pPr algn="r">
+              <a:defRPr sz="900">
+                <a:solidFill>
+                  <a:srgbClr val="475569"/>
+                </a:solidFill>
+                <a:latin typeface="Segoe UI"/>
+              </a:defRPr>
+            </a:pPr>
+            <a:r>
+              <a:t>Prepared by Ashish</a:t>
+            </a:r>
+          </a:p>
+        </p:txBody>
+      </p:sp>
+      <p:sp>
+        <p:nvSpPr>
+          <p:cNvPr id="6" name="Rounded Rectangle 5"/>
           <p:cNvSpPr/>
           <p:nvPr/>
         </p:nvSpPr>
@@ -5593,7 +5809,7 @@
       </p:sp>
       <p:sp>
         <p:nvSpPr>
-          <p:cNvPr id="6" name="TextBox 5"/>
+          <p:cNvPr id="7" name="TextBox 6"/>
           <p:cNvSpPr txBox="1"/>
           <p:nvPr/>
         </p:nvSpPr>
@@ -5737,7 +5953,7 @@
       </p:sp>
       <p:sp>
         <p:nvSpPr>
-          <p:cNvPr id="7" name="Rounded Rectangle 6"/>
+          <p:cNvPr id="8" name="Rounded Rectangle 7"/>
           <p:cNvSpPr/>
           <p:nvPr/>
         </p:nvSpPr>
@@ -5782,7 +5998,7 @@
       </p:sp>
       <p:sp>
         <p:nvSpPr>
-          <p:cNvPr id="8" name="TextBox 7"/>
+          <p:cNvPr id="9" name="TextBox 8"/>
           <p:cNvSpPr txBox="1"/>
           <p:nvPr/>
         </p:nvSpPr>
@@ -6060,7 +6276,43 @@
       </p:sp>
       <p:sp>
         <p:nvSpPr>
-          <p:cNvPr id="5" name="Rounded Rectangle 4"/>
+          <p:cNvPr id="5" name="TextBox 4"/>
+          <p:cNvSpPr txBox="1"/>
+          <p:nvPr/>
+        </p:nvSpPr>
+        <p:spPr>
+          <a:xfrm>
+            <a:off x="8686800" y="6400800"/>
+            <a:ext cx="2743200" cy="320040"/>
+          </a:xfrm>
+          <a:prstGeom prst="rect">
+            <a:avLst/>
+          </a:prstGeom>
+          <a:noFill/>
+        </p:spPr>
+        <p:txBody>
+          <a:bodyPr wrap="none" lIns="0" tIns="0" rIns="0" bIns="0">
+            <a:spAutoFit/>
+          </a:bodyPr>
+          <a:lstStyle/>
+          <a:p>
+            <a:pPr algn="r">
+              <a:defRPr sz="900">
+                <a:solidFill>
+                  <a:srgbClr val="475569"/>
+                </a:solidFill>
+                <a:latin typeface="Segoe UI"/>
+              </a:defRPr>
+            </a:pPr>
+            <a:r>
+              <a:t>Prepared by Ashish</a:t>
+            </a:r>
+          </a:p>
+        </p:txBody>
+      </p:sp>
+      <p:sp>
+        <p:nvSpPr>
+          <p:cNvPr id="6" name="Rounded Rectangle 5"/>
           <p:cNvSpPr/>
           <p:nvPr/>
         </p:nvSpPr>
@@ -6105,7 +6357,7 @@
       </p:sp>
       <p:sp>
         <p:nvSpPr>
-          <p:cNvPr id="6" name="TextBox 5"/>
+          <p:cNvPr id="7" name="TextBox 6"/>
           <p:cNvSpPr txBox="1"/>
           <p:nvPr/>
         </p:nvSpPr>
@@ -6168,7 +6420,7 @@
       </p:sp>
       <p:sp>
         <p:nvSpPr>
-          <p:cNvPr id="7" name="Rounded Rectangle 6"/>
+          <p:cNvPr id="8" name="Rounded Rectangle 7"/>
           <p:cNvSpPr/>
           <p:nvPr/>
         </p:nvSpPr>
@@ -6213,7 +6465,7 @@
       </p:sp>
       <p:sp>
         <p:nvSpPr>
-          <p:cNvPr id="8" name="TextBox 7"/>
+          <p:cNvPr id="9" name="TextBox 8"/>
           <p:cNvSpPr txBox="1"/>
           <p:nvPr/>
         </p:nvSpPr>
@@ -6276,7 +6528,7 @@
       </p:sp>
       <p:sp>
         <p:nvSpPr>
-          <p:cNvPr id="9" name="Rounded Rectangle 8"/>
+          <p:cNvPr id="10" name="Rounded Rectangle 9"/>
           <p:cNvSpPr/>
           <p:nvPr/>
         </p:nvSpPr>
@@ -6321,7 +6573,7 @@
       </p:sp>
       <p:sp>
         <p:nvSpPr>
-          <p:cNvPr id="10" name="TextBox 9"/>
+          <p:cNvPr id="11" name="TextBox 10"/>
           <p:cNvSpPr txBox="1"/>
           <p:nvPr/>
         </p:nvSpPr>
@@ -6384,7 +6636,7 @@
       </p:sp>
       <p:sp>
         <p:nvSpPr>
-          <p:cNvPr id="11" name="Rounded Rectangle 10"/>
+          <p:cNvPr id="12" name="Rounded Rectangle 11"/>
           <p:cNvSpPr/>
           <p:nvPr/>
         </p:nvSpPr>
@@ -6429,7 +6681,7 @@
       </p:sp>
       <p:sp>
         <p:nvSpPr>
-          <p:cNvPr id="12" name="TextBox 11"/>
+          <p:cNvPr id="13" name="TextBox 12"/>
           <p:cNvSpPr txBox="1"/>
           <p:nvPr/>
         </p:nvSpPr>
@@ -6626,7 +6878,43 @@
       </p:sp>
       <p:sp>
         <p:nvSpPr>
-          <p:cNvPr id="5" name="Rounded Rectangle 4"/>
+          <p:cNvPr id="5" name="TextBox 4"/>
+          <p:cNvSpPr txBox="1"/>
+          <p:nvPr/>
+        </p:nvSpPr>
+        <p:spPr>
+          <a:xfrm>
+            <a:off x="8686800" y="6400800"/>
+            <a:ext cx="2743200" cy="320040"/>
+          </a:xfrm>
+          <a:prstGeom prst="rect">
+            <a:avLst/>
+          </a:prstGeom>
+          <a:noFill/>
+        </p:spPr>
+        <p:txBody>
+          <a:bodyPr wrap="none" lIns="0" tIns="0" rIns="0" bIns="0">
+            <a:spAutoFit/>
+          </a:bodyPr>
+          <a:lstStyle/>
+          <a:p>
+            <a:pPr algn="r">
+              <a:defRPr sz="900">
+                <a:solidFill>
+                  <a:srgbClr val="475569"/>
+                </a:solidFill>
+                <a:latin typeface="Segoe UI"/>
+              </a:defRPr>
+            </a:pPr>
+            <a:r>
+              <a:t>Prepared by Ashish</a:t>
+            </a:r>
+          </a:p>
+        </p:txBody>
+      </p:sp>
+      <p:sp>
+        <p:nvSpPr>
+          <p:cNvPr id="6" name="Rounded Rectangle 5"/>
           <p:cNvSpPr/>
           <p:nvPr/>
         </p:nvSpPr>
@@ -6671,7 +6959,7 @@
       </p:sp>
       <p:sp>
         <p:nvSpPr>
-          <p:cNvPr id="6" name="TextBox 5"/>
+          <p:cNvPr id="7" name="TextBox 6"/>
           <p:cNvSpPr txBox="1"/>
           <p:nvPr/>
         </p:nvSpPr>
@@ -6721,7 +7009,7 @@
       </p:sp>
       <p:sp>
         <p:nvSpPr>
-          <p:cNvPr id="7" name="Rounded Rectangle 6"/>
+          <p:cNvPr id="8" name="Rounded Rectangle 7"/>
           <p:cNvSpPr/>
           <p:nvPr/>
         </p:nvSpPr>
@@ -6766,7 +7054,7 @@
       </p:sp>
       <p:sp>
         <p:nvSpPr>
-          <p:cNvPr id="8" name="TextBox 7"/>
+          <p:cNvPr id="9" name="TextBox 8"/>
           <p:cNvSpPr txBox="1"/>
           <p:nvPr/>
         </p:nvSpPr>
@@ -6816,7 +7104,7 @@
       </p:sp>
       <p:sp>
         <p:nvSpPr>
-          <p:cNvPr id="9" name="Rounded Rectangle 8"/>
+          <p:cNvPr id="10" name="Rounded Rectangle 9"/>
           <p:cNvSpPr/>
           <p:nvPr/>
         </p:nvSpPr>
@@ -6861,7 +7149,7 @@
       </p:sp>
       <p:sp>
         <p:nvSpPr>
-          <p:cNvPr id="10" name="TextBox 9"/>
+          <p:cNvPr id="11" name="TextBox 10"/>
           <p:cNvSpPr txBox="1"/>
           <p:nvPr/>
         </p:nvSpPr>
@@ -6911,7 +7199,7 @@
       </p:sp>
       <p:sp>
         <p:nvSpPr>
-          <p:cNvPr id="11" name="Rounded Rectangle 10"/>
+          <p:cNvPr id="12" name="Rounded Rectangle 11"/>
           <p:cNvSpPr/>
           <p:nvPr/>
         </p:nvSpPr>
@@ -6956,7 +7244,7 @@
       </p:sp>
       <p:sp>
         <p:nvSpPr>
-          <p:cNvPr id="12" name="TextBox 11"/>
+          <p:cNvPr id="13" name="TextBox 12"/>
           <p:cNvSpPr txBox="1"/>
           <p:nvPr/>
         </p:nvSpPr>
@@ -7006,7 +7294,7 @@
       </p:sp>
       <p:sp>
         <p:nvSpPr>
-          <p:cNvPr id="13" name="Rounded Rectangle 12"/>
+          <p:cNvPr id="14" name="Rounded Rectangle 13"/>
           <p:cNvSpPr/>
           <p:nvPr/>
         </p:nvSpPr>
@@ -7051,7 +7339,7 @@
       </p:sp>
       <p:sp>
         <p:nvSpPr>
-          <p:cNvPr id="14" name="TextBox 13"/>
+          <p:cNvPr id="15" name="TextBox 14"/>
           <p:cNvSpPr txBox="1"/>
           <p:nvPr/>
         </p:nvSpPr>
@@ -7101,7 +7389,7 @@
       </p:sp>
       <p:sp>
         <p:nvSpPr>
-          <p:cNvPr id="15" name="Rounded Rectangle 14"/>
+          <p:cNvPr id="16" name="Rounded Rectangle 15"/>
           <p:cNvSpPr/>
           <p:nvPr/>
         </p:nvSpPr>
@@ -7146,7 +7434,7 @@
       </p:sp>
       <p:sp>
         <p:nvSpPr>
-          <p:cNvPr id="16" name="TextBox 15"/>
+          <p:cNvPr id="17" name="TextBox 16"/>
           <p:cNvSpPr txBox="1"/>
           <p:nvPr/>
         </p:nvSpPr>
@@ -7196,7 +7484,7 @@
       </p:sp>
       <p:sp>
         <p:nvSpPr>
-          <p:cNvPr id="17" name="Rounded Rectangle 16"/>
+          <p:cNvPr id="18" name="Rounded Rectangle 17"/>
           <p:cNvSpPr/>
           <p:nvPr/>
         </p:nvSpPr>
@@ -7385,7 +7673,43 @@
       </p:sp>
       <p:sp>
         <p:nvSpPr>
-          <p:cNvPr id="5" name="Rounded Rectangle 4"/>
+          <p:cNvPr id="5" name="TextBox 4"/>
+          <p:cNvSpPr txBox="1"/>
+          <p:nvPr/>
+        </p:nvSpPr>
+        <p:spPr>
+          <a:xfrm>
+            <a:off x="8686800" y="6400800"/>
+            <a:ext cx="2743200" cy="320040"/>
+          </a:xfrm>
+          <a:prstGeom prst="rect">
+            <a:avLst/>
+          </a:prstGeom>
+          <a:noFill/>
+        </p:spPr>
+        <p:txBody>
+          <a:bodyPr wrap="none" lIns="0" tIns="0" rIns="0" bIns="0">
+            <a:spAutoFit/>
+          </a:bodyPr>
+          <a:lstStyle/>
+          <a:p>
+            <a:pPr algn="r">
+              <a:defRPr sz="900">
+                <a:solidFill>
+                  <a:srgbClr val="475569"/>
+                </a:solidFill>
+                <a:latin typeface="Segoe UI"/>
+              </a:defRPr>
+            </a:pPr>
+            <a:r>
+              <a:t>Prepared by Ashish</a:t>
+            </a:r>
+          </a:p>
+        </p:txBody>
+      </p:sp>
+      <p:sp>
+        <p:nvSpPr>
+          <p:cNvPr id="6" name="Rounded Rectangle 5"/>
           <p:cNvSpPr/>
           <p:nvPr/>
         </p:nvSpPr>
@@ -7430,7 +7754,7 @@
       </p:sp>
       <p:sp>
         <p:nvSpPr>
-          <p:cNvPr id="6" name="TextBox 5"/>
+          <p:cNvPr id="7" name="TextBox 6"/>
           <p:cNvSpPr txBox="1"/>
           <p:nvPr/>
         </p:nvSpPr>
@@ -7503,7 +7827,7 @@
       </p:sp>
       <p:sp>
         <p:nvSpPr>
-          <p:cNvPr id="7" name="Rounded Rectangle 6"/>
+          <p:cNvPr id="8" name="Rounded Rectangle 7"/>
           <p:cNvSpPr/>
           <p:nvPr/>
         </p:nvSpPr>
@@ -7548,7 +7872,7 @@
       </p:sp>
       <p:sp>
         <p:nvSpPr>
-          <p:cNvPr id="8" name="TextBox 7"/>
+          <p:cNvPr id="9" name="TextBox 8"/>
           <p:cNvSpPr txBox="1"/>
           <p:nvPr/>
         </p:nvSpPr>
@@ -7826,7 +8150,43 @@
       </p:sp>
       <p:sp>
         <p:nvSpPr>
-          <p:cNvPr id="5" name="Rounded Rectangle 4"/>
+          <p:cNvPr id="5" name="TextBox 4"/>
+          <p:cNvSpPr txBox="1"/>
+          <p:nvPr/>
+        </p:nvSpPr>
+        <p:spPr>
+          <a:xfrm>
+            <a:off x="8686800" y="6400800"/>
+            <a:ext cx="2743200" cy="320040"/>
+          </a:xfrm>
+          <a:prstGeom prst="rect">
+            <a:avLst/>
+          </a:prstGeom>
+          <a:noFill/>
+        </p:spPr>
+        <p:txBody>
+          <a:bodyPr wrap="none" lIns="0" tIns="0" rIns="0" bIns="0">
+            <a:spAutoFit/>
+          </a:bodyPr>
+          <a:lstStyle/>
+          <a:p>
+            <a:pPr algn="r">
+              <a:defRPr sz="900">
+                <a:solidFill>
+                  <a:srgbClr val="475569"/>
+                </a:solidFill>
+                <a:latin typeface="Segoe UI"/>
+              </a:defRPr>
+            </a:pPr>
+            <a:r>
+              <a:t>Prepared by Ashish</a:t>
+            </a:r>
+          </a:p>
+        </p:txBody>
+      </p:sp>
+      <p:sp>
+        <p:nvSpPr>
+          <p:cNvPr id="6" name="Rounded Rectangle 5"/>
           <p:cNvSpPr/>
           <p:nvPr/>
         </p:nvSpPr>
@@ -7871,7 +8231,7 @@
       </p:sp>
       <p:sp>
         <p:nvSpPr>
-          <p:cNvPr id="6" name="TextBox 5"/>
+          <p:cNvPr id="7" name="TextBox 6"/>
           <p:cNvSpPr txBox="1"/>
           <p:nvPr/>
         </p:nvSpPr>
@@ -7934,7 +8294,7 @@
       </p:sp>
       <p:sp>
         <p:nvSpPr>
-          <p:cNvPr id="7" name="Rounded Rectangle 6"/>
+          <p:cNvPr id="8" name="Rounded Rectangle 7"/>
           <p:cNvSpPr/>
           <p:nvPr/>
         </p:nvSpPr>
@@ -7979,7 +8339,7 @@
       </p:sp>
       <p:sp>
         <p:nvSpPr>
-          <p:cNvPr id="8" name="TextBox 7"/>
+          <p:cNvPr id="9" name="TextBox 8"/>
           <p:cNvSpPr txBox="1"/>
           <p:nvPr/>
         </p:nvSpPr>
@@ -8042,7 +8402,7 @@
       </p:sp>
       <p:sp>
         <p:nvSpPr>
-          <p:cNvPr id="9" name="Rounded Rectangle 8"/>
+          <p:cNvPr id="10" name="Rounded Rectangle 9"/>
           <p:cNvSpPr/>
           <p:nvPr/>
         </p:nvSpPr>
@@ -8087,7 +8447,7 @@
       </p:sp>
       <p:sp>
         <p:nvSpPr>
-          <p:cNvPr id="10" name="TextBox 9"/>
+          <p:cNvPr id="11" name="TextBox 10"/>
           <p:cNvSpPr txBox="1"/>
           <p:nvPr/>
         </p:nvSpPr>
@@ -8150,7 +8510,7 @@
       </p:sp>
       <p:sp>
         <p:nvSpPr>
-          <p:cNvPr id="11" name="Rounded Rectangle 10"/>
+          <p:cNvPr id="12" name="Rounded Rectangle 11"/>
           <p:cNvSpPr/>
           <p:nvPr/>
         </p:nvSpPr>
@@ -8195,7 +8555,7 @@
       </p:sp>
       <p:sp>
         <p:nvSpPr>
-          <p:cNvPr id="12" name="TextBox 11"/>
+          <p:cNvPr id="13" name="TextBox 12"/>
           <p:cNvSpPr txBox="1"/>
           <p:nvPr/>
         </p:nvSpPr>
@@ -8378,7 +8738,43 @@
       </p:sp>
       <p:sp>
         <p:nvSpPr>
-          <p:cNvPr id="5" name="Rounded Rectangle 4"/>
+          <p:cNvPr id="5" name="TextBox 4"/>
+          <p:cNvSpPr txBox="1"/>
+          <p:nvPr/>
+        </p:nvSpPr>
+        <p:spPr>
+          <a:xfrm>
+            <a:off x="8686800" y="6400800"/>
+            <a:ext cx="2743200" cy="320040"/>
+          </a:xfrm>
+          <a:prstGeom prst="rect">
+            <a:avLst/>
+          </a:prstGeom>
+          <a:noFill/>
+        </p:spPr>
+        <p:txBody>
+          <a:bodyPr wrap="none" lIns="0" tIns="0" rIns="0" bIns="0">
+            <a:spAutoFit/>
+          </a:bodyPr>
+          <a:lstStyle/>
+          <a:p>
+            <a:pPr algn="r">
+              <a:defRPr sz="900">
+                <a:solidFill>
+                  <a:srgbClr val="475569"/>
+                </a:solidFill>
+                <a:latin typeface="Segoe UI"/>
+              </a:defRPr>
+            </a:pPr>
+            <a:r>
+              <a:t>Prepared by Ashish</a:t>
+            </a:r>
+          </a:p>
+        </p:txBody>
+      </p:sp>
+      <p:sp>
+        <p:nvSpPr>
+          <p:cNvPr id="6" name="Rounded Rectangle 5"/>
           <p:cNvSpPr/>
           <p:nvPr/>
         </p:nvSpPr>
@@ -8423,7 +8819,7 @@
       </p:sp>
       <p:sp>
         <p:nvSpPr>
-          <p:cNvPr id="6" name="TextBox 5"/>
+          <p:cNvPr id="7" name="TextBox 6"/>
           <p:cNvSpPr txBox="1"/>
           <p:nvPr/>
         </p:nvSpPr>
@@ -8473,7 +8869,7 @@
       </p:sp>
       <p:sp>
         <p:nvSpPr>
-          <p:cNvPr id="7" name="Rounded Rectangle 6"/>
+          <p:cNvPr id="8" name="Rounded Rectangle 7"/>
           <p:cNvSpPr/>
           <p:nvPr/>
         </p:nvSpPr>
@@ -8518,7 +8914,7 @@
       </p:sp>
       <p:sp>
         <p:nvSpPr>
-          <p:cNvPr id="8" name="TextBox 7"/>
+          <p:cNvPr id="9" name="TextBox 8"/>
           <p:cNvSpPr txBox="1"/>
           <p:nvPr/>
         </p:nvSpPr>
@@ -8568,7 +8964,7 @@
       </p:sp>
       <p:sp>
         <p:nvSpPr>
-          <p:cNvPr id="9" name="Rounded Rectangle 8"/>
+          <p:cNvPr id="10" name="Rounded Rectangle 9"/>
           <p:cNvSpPr/>
           <p:nvPr/>
         </p:nvSpPr>
@@ -8613,7 +9009,7 @@
       </p:sp>
       <p:sp>
         <p:nvSpPr>
-          <p:cNvPr id="10" name="TextBox 9"/>
+          <p:cNvPr id="11" name="TextBox 10"/>
           <p:cNvSpPr txBox="1"/>
           <p:nvPr/>
         </p:nvSpPr>
@@ -8663,7 +9059,7 @@
       </p:sp>
       <p:sp>
         <p:nvSpPr>
-          <p:cNvPr id="11" name="Rounded Rectangle 10"/>
+          <p:cNvPr id="12" name="Rounded Rectangle 11"/>
           <p:cNvSpPr/>
           <p:nvPr/>
         </p:nvSpPr>
@@ -8708,7 +9104,7 @@
       </p:sp>
       <p:sp>
         <p:nvSpPr>
-          <p:cNvPr id="12" name="TextBox 11"/>
+          <p:cNvPr id="13" name="TextBox 12"/>
           <p:cNvSpPr txBox="1"/>
           <p:nvPr/>
         </p:nvSpPr>
@@ -8892,7 +9288,43 @@
       </p:sp>
       <p:sp>
         <p:nvSpPr>
-          <p:cNvPr id="5" name="Rounded Rectangle 4"/>
+          <p:cNvPr id="5" name="TextBox 4"/>
+          <p:cNvSpPr txBox="1"/>
+          <p:nvPr/>
+        </p:nvSpPr>
+        <p:spPr>
+          <a:xfrm>
+            <a:off x="8686800" y="6400800"/>
+            <a:ext cx="2743200" cy="320040"/>
+          </a:xfrm>
+          <a:prstGeom prst="rect">
+            <a:avLst/>
+          </a:prstGeom>
+          <a:noFill/>
+        </p:spPr>
+        <p:txBody>
+          <a:bodyPr wrap="none" lIns="0" tIns="0" rIns="0" bIns="0">
+            <a:spAutoFit/>
+          </a:bodyPr>
+          <a:lstStyle/>
+          <a:p>
+            <a:pPr algn="r">
+              <a:defRPr sz="900">
+                <a:solidFill>
+                  <a:srgbClr val="475569"/>
+                </a:solidFill>
+                <a:latin typeface="Segoe UI"/>
+              </a:defRPr>
+            </a:pPr>
+            <a:r>
+              <a:t>Prepared by Ashish</a:t>
+            </a:r>
+          </a:p>
+        </p:txBody>
+      </p:sp>
+      <p:sp>
+        <p:nvSpPr>
+          <p:cNvPr id="6" name="Rounded Rectangle 5"/>
           <p:cNvSpPr/>
           <p:nvPr/>
         </p:nvSpPr>
@@ -8937,7 +9369,7 @@
       </p:sp>
       <p:sp>
         <p:nvSpPr>
-          <p:cNvPr id="6" name="TextBox 5"/>
+          <p:cNvPr id="7" name="TextBox 6"/>
           <p:cNvSpPr txBox="1"/>
           <p:nvPr/>
         </p:nvSpPr>
@@ -9000,7 +9432,7 @@
       </p:sp>
       <p:sp>
         <p:nvSpPr>
-          <p:cNvPr id="7" name="Rounded Rectangle 6"/>
+          <p:cNvPr id="8" name="Rounded Rectangle 7"/>
           <p:cNvSpPr/>
           <p:nvPr/>
         </p:nvSpPr>
@@ -9045,7 +9477,7 @@
       </p:sp>
       <p:sp>
         <p:nvSpPr>
-          <p:cNvPr id="8" name="TextBox 7"/>
+          <p:cNvPr id="9" name="TextBox 8"/>
           <p:cNvSpPr txBox="1"/>
           <p:nvPr/>
         </p:nvSpPr>
@@ -9108,7 +9540,7 @@
       </p:sp>
       <p:sp>
         <p:nvSpPr>
-          <p:cNvPr id="9" name="Rounded Rectangle 8"/>
+          <p:cNvPr id="10" name="Rounded Rectangle 9"/>
           <p:cNvSpPr/>
           <p:nvPr/>
         </p:nvSpPr>
@@ -9153,7 +9585,7 @@
       </p:sp>
       <p:sp>
         <p:nvSpPr>
-          <p:cNvPr id="10" name="TextBox 9"/>
+          <p:cNvPr id="11" name="TextBox 10"/>
           <p:cNvSpPr txBox="1"/>
           <p:nvPr/>
         </p:nvSpPr>
